--- a/dist/초5/과학/용액과분리/초5_과학_용액과분리_02_혼합물의분리.pptx
+++ b/dist/초5/과학/용액과분리/초5_과학_용액과분리_02_혼합물의분리.pptx
@@ -125,20 +125,20 @@
   <p:extLst>
     <p:ext uri="{521415D9-36F7-43E2-AB2F-B90AF26B5E84}">
       <p14:sectionLst xmlns:p14="http://schemas.microsoft.com/office/powerpoint/2010/main">
-        <p14:section name="도입" id="{cd7dea54-5772-ea61-d6a7-807e356bfaf5}">
+        <p14:section name="도입" id="{e1327056-d86e-b983-1116-23f3af4b4b98}">
           <p14:sldIdLst>
             <p14:sldId id="256"/>
             <p14:sldId id="257"/>
           </p14:sldIdLst>
         </p14:section>
-        <p14:section name="개념" id="{bf788dae-9ae6-5fa4-e3b5-81f831b9e023}">
+        <p14:section name="개념" id="{2ea2fc77-6080-08e9-41af-2de9b8f3a5ca}">
           <p14:sldIdLst>
             <p14:sldId id="258"/>
             <p14:sldId id="262"/>
             <p14:sldId id="267"/>
           </p14:sldIdLst>
         </p14:section>
-        <p14:section name="연습" id="{0198654b-38c0-2b88-fa91-2d33500c4da3}">
+        <p14:section name="연습" id="{4a4c23a0-4132-4678-b924-889d67c2b9b1}">
           <p14:sldIdLst>
             <p14:sldId id="259"/>
             <p14:sldId id="260"/>
@@ -151,31 +151,31 @@
             <p14:sldId id="269"/>
           </p14:sldIdLst>
         </p14:section>
-        <p14:section name="개념" id="{8344dfd5-f3f7-2353-0ab2-218294a1d530}">
+        <p14:section name="개념" id="{31583928-886d-0e6e-086a-999c874b07f1}">
           <p14:sldIdLst/>
         </p14:section>
-        <p14:section name="연습" id="{3bfc2c98-38ae-8555-5280-8691d0afe821}">
+        <p14:section name="연습" id="{9ba825a0-249d-b254-5f81-6a0c27bbc200}">
           <p14:sldIdLst/>
         </p14:section>
-        <p14:section name="개념" id="{0b043c10-6498-6e87-1d7c-ff836feab7a7}">
+        <p14:section name="개념" id="{1b4dbbc9-c7a5-8f71-bff2-4c1a50093a0b}">
           <p14:sldIdLst/>
         </p14:section>
-        <p14:section name="연습" id="{4b123e07-6d07-6812-f3cc-e6f08b1795ed}">
+        <p14:section name="연습" id="{16ef1348-0bce-357b-c9a1-e5c0ce4d1aa1}">
           <p14:sldIdLst/>
         </p14:section>
-        <p14:section name="확인" id="{54621683-49b2-ccd6-6f1a-58328456d8d9}">
+        <p14:section name="확인" id="{bb3bb621-5dcb-07bd-543e-87dcb8c9c690}">
           <p14:sldIdLst>
             <p14:sldId id="270"/>
             <p14:sldId id="271"/>
             <p14:sldId id="272"/>
           </p14:sldIdLst>
         </p14:section>
-        <p14:section name="정리" id="{0bdadfc3-2b3e-db2b-d3b2-cacf45635e27}">
+        <p14:section name="정리" id="{0a725c05-d4cc-ab26-ecd8-1c743dadd7b0}">
           <p14:sldIdLst>
             <p14:sldId id="273"/>
           </p14:sldIdLst>
         </p14:section>
-        <p14:section name="보충" id="{a217b9fd-574f-5d40-5eec-f3ca9b4dafc2}">
+        <p14:section name="보충" id="{b4cfe033-7d92-56c3-b8f6-06c0e5a5d08b}">
           <p14:sldIdLst>
             <p14:sldId id="274"/>
           </p14:sldIdLst>
@@ -4231,7 +4231,7 @@
       </p:sp>
       <p:sp>
         <p:nvSpPr>
-          <p:cNvPr id="3" name="S10-card92"/>
+          <p:cNvPr id="3" name="S10-card86"/>
           <p:cNvSpPr/>
           <p:nvPr/>
         </p:nvSpPr>
@@ -4258,7 +4258,7 @@
       </p:sp>
       <p:sp>
         <p:nvSpPr>
-          <p:cNvPr id="4" name="S10-cardtext93"/>
+          <p:cNvPr id="4" name="S10-cardtext87"/>
           <p:cNvSpPr txBox="1"/>
           <p:nvPr/>
         </p:nvSpPr>
@@ -4300,14 +4300,14 @@
       </p:sp>
       <p:sp>
         <p:nvSpPr>
-          <p:cNvPr id="5" name="S10-figure94" descr="빈 컵 위에 원뿔 모양으로 편 커피 필터를 얹고, 섞은 물을 위에서 붓는 그림"/>
+          <p:cNvPr id="5" name="S10-figure88" descr="빈 컵 위에 원뿔 모양으로 편 커피 필터를 얹은 거름 장치"/>
           <p:cNvSpPr/>
           <p:nvPr/>
         </p:nvSpPr>
         <p:spPr>
           <a:xfrm>
-            <a:off x="9063332" y="2264587"/>
-            <a:ext cx="937933" cy="854887"/>
+            <a:off x="7591340" y="2090217"/>
+            <a:ext cx="1229734" cy="1120851"/>
           </a:xfrm>
           <a:custGeom>
             <a:avLst/>
@@ -4316,18 +4316,18 @@
             <a:cxnLst/>
             <a:rect l="l" t="t" r="r" b="b"/>
             <a:pathLst>
-              <a:path w="937933" h="854887">
+              <a:path w="1229734" h="1120851">
                 <a:moveTo>
                   <a:pt x="0" y="0"/>
                 </a:moveTo>
                 <a:lnTo>
-                  <a:pt x="102586" y="854887"/>
+                  <a:pt x="134502" y="1120851"/>
                 </a:lnTo>
                 <a:lnTo>
-                  <a:pt x="835346" y="854887"/>
+                  <a:pt x="1095232" y="1120851"/>
                 </a:lnTo>
                 <a:lnTo>
-                  <a:pt x="937933" y="0"/>
+                  <a:pt x="1229734" y="0"/>
                 </a:lnTo>
               </a:path>
             </a:pathLst>
@@ -4343,14 +4343,14 @@
       </p:sp>
       <p:sp>
         <p:nvSpPr>
-          <p:cNvPr id="6" name="S10-mark95"/>
+          <p:cNvPr id="6" name="S10-mark89"/>
           <p:cNvSpPr/>
           <p:nvPr/>
         </p:nvSpPr>
         <p:spPr>
           <a:xfrm>
-            <a:off x="8982729" y="1715017"/>
-            <a:ext cx="1099140" cy="793823"/>
+            <a:off x="7525690" y="1449730"/>
+            <a:ext cx="1361034" cy="880669"/>
           </a:xfrm>
           <a:custGeom>
             <a:avLst/>
@@ -4359,18 +4359,18 @@
             <a:cxnLst/>
             <a:rect l="l" t="t" r="r" b="b"/>
             <a:pathLst>
-              <a:path w="1099140" h="793823">
+              <a:path w="1361034" h="880669">
                 <a:moveTo>
                   <a:pt x="0" y="0"/>
                 </a:moveTo>
                 <a:lnTo>
-                  <a:pt x="1099140" y="0"/>
+                  <a:pt x="1361034" y="0"/>
                 </a:lnTo>
                 <a:lnTo>
-                  <a:pt x="671697" y="793823"/>
+                  <a:pt x="840638" y="880669"/>
                 </a:lnTo>
                 <a:lnTo>
-                  <a:pt x="427443" y="793823"/>
+                  <a:pt x="520395" y="880669"/>
                 </a:lnTo>
                 <a:close/>
               </a:path>
@@ -4389,38 +4389,60 @@
       </p:sp>
       <p:sp>
         <p:nvSpPr>
-          <p:cNvPr id="7" name="S10-mark96"/>
+          <p:cNvPr id="7" name="S10-mark90"/>
           <p:cNvSpPr/>
           <p:nvPr/>
         </p:nvSpPr>
         <p:spPr>
-          <a:xfrm>
-            <a:off x="8494222" y="1470763"/>
-            <a:ext cx="549570" cy="366380"/>
+          <a:xfrm flipH="1">
+            <a:off x="8646541" y="1769974"/>
+            <a:ext cx="360274" cy="0"/>
           </a:xfrm>
           <a:prstGeom prst="line">
             <a:avLst/>
           </a:prstGeom>
           <a:noFill/>
-          <a:ln w="31750">
+          <a:ln w="19050">
             <a:solidFill>
-              <a:srgbClr val="3D5A80"/>
+              <a:srgbClr val="6B7280"/>
             </a:solidFill>
             <a:prstDash val="solid"/>
-            <a:tailEnd type="triangle"/>
           </a:ln>
         </p:spPr>
       </p:sp>
       <p:sp>
         <p:nvSpPr>
-          <p:cNvPr id="8" name="S10-label98"/>
+          <p:cNvPr id="8" name="S10-mark91"/>
+          <p:cNvSpPr/>
+          <p:nvPr/>
+        </p:nvSpPr>
+        <p:spPr>
+          <a:xfrm flipH="1">
+            <a:off x="8766632" y="2730703"/>
+            <a:ext cx="240182" cy="0"/>
+          </a:xfrm>
+          <a:prstGeom prst="line">
+            <a:avLst/>
+          </a:prstGeom>
+          <a:noFill/>
+          <a:ln w="19050">
+            <a:solidFill>
+              <a:srgbClr val="6B7280"/>
+            </a:solidFill>
+            <a:prstDash val="solid"/>
+          </a:ln>
+        </p:spPr>
+      </p:sp>
+      <p:sp>
+        <p:nvSpPr>
+          <p:cNvPr id="9" name="S10-label93"/>
           <p:cNvSpPr txBox="1"/>
           <p:nvPr/>
         </p:nvSpPr>
         <p:spPr>
           <a:xfrm>
-            <a:off x="9203622" y="1671083"/>
-            <a:ext cx="657352" cy="698500"/>
+            <a:off x="9086875" y="1595349"/>
+            <a:ext cx="1288796" cy="349250"/>
           </a:xfrm>
           <a:prstGeom prst="rect">
             <a:avLst/>
@@ -4432,7 +4454,7 @@
           <a:bodyPr wrap="square" lIns="0" tIns="0" rIns="0" bIns="0" rtlCol="0" anchor="ctr"/>
           <a:lstStyle/>
           <a:p>
-            <a:pPr eaLnBrk="0" algn="ctr" indent="0" marL="0">
+            <a:pPr eaLnBrk="0" algn="l" indent="0" marL="0">
               <a:buNone/>
             </a:pPr>
             <a:r>
@@ -4444,39 +4466,22 @@
                 <a:ea typeface="맑은 고딕" pitchFamily="34" charset="-122"/>
                 <a:cs typeface="맑은 고딕" pitchFamily="34" charset="-120"/>
               </a:rPr>
-              <a:t>커피</a:t>
+              <a:t>커피 필터</a:t>
             </a:r>
             <a:endParaRPr lang="ko-KR" sz="2200" dirty="0"/>
           </a:p>
-          <a:p>
-            <a:pPr eaLnBrk="0" algn="ctr" indent="0" marL="0">
-              <a:buNone/>
-            </a:pPr>
-            <a:r>
-              <a:rPr lang="ko-KR" altLang="en-US" sz="2200" b="1" dirty="0">
-                <a:solidFill>
-                  <a:srgbClr val="1F2937"/>
-                </a:solidFill>
-                <a:latin typeface="맑은 고딕" pitchFamily="34" charset="0"/>
-                <a:ea typeface="맑은 고딕" pitchFamily="34" charset="-122"/>
-                <a:cs typeface="맑은 고딕" pitchFamily="34" charset="-120"/>
-              </a:rPr>
-              <a:t>필터</a:t>
-            </a:r>
-            <a:endParaRPr lang="ko-KR" sz="2200" dirty="0"/>
-          </a:p>
-        </p:txBody>
-      </p:sp>
-      <p:sp>
-        <p:nvSpPr>
-          <p:cNvPr id="9" name="S10-label100"/>
+        </p:txBody>
+      </p:sp>
+      <p:sp>
+        <p:nvSpPr>
+          <p:cNvPr id="10" name="S10-label95"/>
           <p:cNvSpPr txBox="1"/>
           <p:nvPr/>
         </p:nvSpPr>
         <p:spPr>
           <a:xfrm>
-            <a:off x="9340528" y="2639531"/>
-            <a:ext cx="383540" cy="349250"/>
+            <a:off x="9086875" y="2556078"/>
+            <a:ext cx="741172" cy="349250"/>
           </a:xfrm>
           <a:prstGeom prst="rect">
             <a:avLst/>
@@ -4488,7 +4493,7 @@
           <a:bodyPr wrap="square" lIns="0" tIns="0" rIns="0" bIns="0" rtlCol="0" anchor="ctr"/>
           <a:lstStyle/>
           <a:p>
-            <a:pPr eaLnBrk="0" algn="ctr" indent="0" marL="0">
+            <a:pPr eaLnBrk="0" algn="l" indent="0" marL="0">
               <a:buNone/>
             </a:pPr>
             <a:r>
@@ -4500,7 +4505,7 @@
                 <a:ea typeface="맑은 고딕" pitchFamily="34" charset="-122"/>
                 <a:cs typeface="맑은 고딕" pitchFamily="34" charset="-120"/>
               </a:rPr>
-              <a:t>컵</a:t>
+              <a:t>빈 컵</a:t>
             </a:r>
             <a:endParaRPr lang="ko-KR" sz="2200" dirty="0"/>
           </a:p>
@@ -4508,46 +4513,7 @@
       </p:sp>
       <p:sp>
         <p:nvSpPr>
-          <p:cNvPr id="10" name="S10-label102"/>
-          <p:cNvSpPr txBox="1"/>
-          <p:nvPr/>
-        </p:nvSpPr>
-        <p:spPr>
-          <a:xfrm>
-            <a:off x="8306925" y="1602673"/>
-            <a:ext cx="557784" cy="285750"/>
-          </a:xfrm>
-          <a:prstGeom prst="rect">
-            <a:avLst/>
-          </a:prstGeom>
-          <a:noFill/>
-          <a:ln/>
-        </p:spPr>
-        <p:txBody>
-          <a:bodyPr wrap="square" lIns="0" tIns="0" rIns="0" bIns="0" rtlCol="0" anchor="ctr"/>
-          <a:lstStyle/>
-          <a:p>
-            <a:pPr eaLnBrk="0" algn="ctr" indent="0" marL="0">
-              <a:buNone/>
-            </a:pPr>
-            <a:r>
-              <a:rPr lang="ko-KR" altLang="en-US" sz="1800" b="1" dirty="0">
-                <a:solidFill>
-                  <a:srgbClr val="1F2937"/>
-                </a:solidFill>
-                <a:latin typeface="맑은 고딕" pitchFamily="34" charset="0"/>
-                <a:ea typeface="맑은 고딕" pitchFamily="34" charset="-122"/>
-                <a:cs typeface="맑은 고딕" pitchFamily="34" charset="-120"/>
-              </a:rPr>
-              <a:t>붓기</a:t>
-            </a:r>
-            <a:endParaRPr lang="ko-KR" sz="1800" dirty="0"/>
-          </a:p>
-        </p:txBody>
-      </p:sp>
-      <p:sp>
-        <p:nvSpPr>
-          <p:cNvPr id="11" name="S10-card103"/>
+          <p:cNvPr id="11" name="S10-card96"/>
           <p:cNvSpPr/>
           <p:nvPr/>
         </p:nvSpPr>
@@ -4574,7 +4540,7 @@
       </p:sp>
       <p:sp>
         <p:nvSpPr>
-          <p:cNvPr id="12" name="S10-cardtext104"/>
+          <p:cNvPr id="12" name="S10-cardtext97"/>
           <p:cNvSpPr txBox="1"/>
           <p:nvPr/>
         </p:nvSpPr>
@@ -4656,7 +4622,7 @@
       </p:sp>
       <p:sp>
         <p:nvSpPr>
-          <p:cNvPr id="13" name="S10-stepno105"/>
+          <p:cNvPr id="13" name="S10-stepno98"/>
           <p:cNvSpPr txBox="1"/>
           <p:nvPr/>
         </p:nvSpPr>
@@ -4701,7 +4667,7 @@
       </p:sp>
       <p:sp>
         <p:nvSpPr>
-          <p:cNvPr id="14" name="S10-text106"/>
+          <p:cNvPr id="14" name="S10-text99"/>
           <p:cNvSpPr txBox="1"/>
           <p:nvPr/>
         </p:nvSpPr>
@@ -4757,7 +4723,7 @@
       </p:sp>
       <p:sp>
         <p:nvSpPr>
-          <p:cNvPr id="15" name="S10-stepno107"/>
+          <p:cNvPr id="15" name="S10-stepno100"/>
           <p:cNvSpPr txBox="1"/>
           <p:nvPr/>
         </p:nvSpPr>
@@ -4802,7 +4768,7 @@
       </p:sp>
       <p:sp>
         <p:nvSpPr>
-          <p:cNvPr id="16" name="S10-text108"/>
+          <p:cNvPr id="16" name="S10-text101"/>
           <p:cNvSpPr txBox="1"/>
           <p:nvPr/>
         </p:nvSpPr>
@@ -4858,7 +4824,7 @@
       </p:sp>
       <p:sp>
         <p:nvSpPr>
-          <p:cNvPr id="17" name="S10-stepno109"/>
+          <p:cNvPr id="17" name="S10-stepno102"/>
           <p:cNvSpPr txBox="1"/>
           <p:nvPr/>
         </p:nvSpPr>
@@ -4903,7 +4869,7 @@
       </p:sp>
       <p:sp>
         <p:nvSpPr>
-          <p:cNvPr id="18" name="S10-text110"/>
+          <p:cNvPr id="18" name="S10-text103"/>
           <p:cNvSpPr txBox="1"/>
           <p:nvPr/>
         </p:nvSpPr>
@@ -4959,7 +4925,7 @@
       </p:sp>
       <p:sp>
         <p:nvSpPr>
-          <p:cNvPr id="19" name="S10-stepno111"/>
+          <p:cNvPr id="19" name="S10-stepno104"/>
           <p:cNvSpPr txBox="1"/>
           <p:nvPr/>
         </p:nvSpPr>
@@ -5004,7 +4970,7 @@
       </p:sp>
       <p:sp>
         <p:nvSpPr>
-          <p:cNvPr id="20" name="S10-text112"/>
+          <p:cNvPr id="20" name="S10-text105"/>
           <p:cNvSpPr txBox="1"/>
           <p:nvPr/>
         </p:nvSpPr>
@@ -5174,7 +5140,7 @@
       </p:sp>
       <p:sp>
         <p:nvSpPr>
-          <p:cNvPr id="3" name="S11-text113"/>
+          <p:cNvPr id="3" name="S11-text106"/>
           <p:cNvSpPr txBox="1"/>
           <p:nvPr/>
         </p:nvSpPr>
@@ -5213,7 +5179,7 @@
       </p:sp>
       <p:sp>
         <p:nvSpPr>
-          <p:cNvPr id="4" name="S11-card114"/>
+          <p:cNvPr id="4" name="S11-card107"/>
           <p:cNvSpPr/>
           <p:nvPr/>
         </p:nvSpPr>
@@ -5240,7 +5206,7 @@
       </p:sp>
       <p:sp>
         <p:nvSpPr>
-          <p:cNvPr id="5" name="S11-cardtext115"/>
+          <p:cNvPr id="5" name="S11-cardtext108"/>
           <p:cNvSpPr txBox="1"/>
           <p:nvPr/>
         </p:nvSpPr>
@@ -5282,7 +5248,7 @@
       </p:sp>
       <p:graphicFrame>
         <p:nvGraphicFramePr>
-          <p:cNvPr id="12" name="S11-table116"/>
+          <p:cNvPr id="12" name="S11-table109"/>
           <p:cNvGraphicFramePr>
             <a:graphicFrameLocks noGrp="1"/>
           </p:cNvGraphicFramePr>
@@ -6072,7 +6038,7 @@
       </p:sp>
       <p:sp>
         <p:nvSpPr>
-          <p:cNvPr id="3" name="S12-text117"/>
+          <p:cNvPr id="3" name="S12-text110"/>
           <p:cNvSpPr txBox="1"/>
           <p:nvPr/>
         </p:nvSpPr>
@@ -6111,7 +6077,7 @@
       </p:sp>
       <p:sp>
         <p:nvSpPr>
-          <p:cNvPr id="4" name="S12-card118"/>
+          <p:cNvPr id="4" name="S12-card111"/>
           <p:cNvSpPr/>
           <p:nvPr/>
         </p:nvSpPr>
@@ -6138,7 +6104,7 @@
       </p:sp>
       <p:sp>
         <p:nvSpPr>
-          <p:cNvPr id="5" name="S12-cardtext119"/>
+          <p:cNvPr id="5" name="S12-cardtext112"/>
           <p:cNvSpPr txBox="1"/>
           <p:nvPr/>
         </p:nvSpPr>
@@ -6180,7 +6146,7 @@
       </p:sp>
       <p:sp>
         <p:nvSpPr>
-          <p:cNvPr id="6" name="S12-step120"/>
+          <p:cNvPr id="6" name="S12-step113"/>
           <p:cNvSpPr txBox="1"/>
           <p:nvPr/>
         </p:nvSpPr>
@@ -6244,7 +6210,7 @@
       </p:sp>
       <p:sp>
         <p:nvSpPr>
-          <p:cNvPr id="7" name="S12-line121"/>
+          <p:cNvPr id="7" name="S12-line114"/>
           <p:cNvSpPr/>
           <p:nvPr/>
         </p:nvSpPr>
@@ -6268,7 +6234,7 @@
       </p:sp>
       <p:sp>
         <p:nvSpPr>
-          <p:cNvPr id="8" name="S12-step122"/>
+          <p:cNvPr id="8" name="S12-step115"/>
           <p:cNvSpPr txBox="1"/>
           <p:nvPr/>
         </p:nvSpPr>
@@ -6332,7 +6298,7 @@
       </p:sp>
       <p:sp>
         <p:nvSpPr>
-          <p:cNvPr id="9" name="S12-line123"/>
+          <p:cNvPr id="9" name="S12-line116"/>
           <p:cNvSpPr/>
           <p:nvPr/>
         </p:nvSpPr>
@@ -6356,7 +6322,7 @@
       </p:sp>
       <p:sp>
         <p:nvSpPr>
-          <p:cNvPr id="10" name="S12-step124"/>
+          <p:cNvPr id="10" name="S12-step117"/>
           <p:cNvSpPr txBox="1"/>
           <p:nvPr/>
         </p:nvSpPr>
@@ -6420,7 +6386,7 @@
       </p:sp>
       <p:sp>
         <p:nvSpPr>
-          <p:cNvPr id="11" name="S12-line125"/>
+          <p:cNvPr id="11" name="S12-line118"/>
           <p:cNvSpPr/>
           <p:nvPr/>
         </p:nvSpPr>
@@ -6444,7 +6410,7 @@
       </p:sp>
       <p:sp>
         <p:nvSpPr>
-          <p:cNvPr id="12" name="S12-step126"/>
+          <p:cNvPr id="12" name="S12-step119"/>
           <p:cNvSpPr txBox="1"/>
           <p:nvPr/>
         </p:nvSpPr>
@@ -6622,7 +6588,7 @@
       </p:sp>
       <p:sp>
         <p:nvSpPr>
-          <p:cNvPr id="3" name="S13-card127"/>
+          <p:cNvPr id="3" name="S13-card120"/>
           <p:cNvSpPr/>
           <p:nvPr/>
         </p:nvSpPr>
@@ -6649,7 +6615,7 @@
       </p:sp>
       <p:sp>
         <p:nvSpPr>
-          <p:cNvPr id="4" name="S13-cardtext128"/>
+          <p:cNvPr id="4" name="S13-cardtext121"/>
           <p:cNvSpPr txBox="1"/>
           <p:nvPr/>
         </p:nvSpPr>
@@ -6691,7 +6657,7 @@
       </p:sp>
       <p:sp>
         <p:nvSpPr>
-          <p:cNvPr id="5" name="S13-card129"/>
+          <p:cNvPr id="5" name="S13-card122"/>
           <p:cNvSpPr/>
           <p:nvPr/>
         </p:nvSpPr>
@@ -6718,7 +6684,7 @@
       </p:sp>
       <p:sp>
         <p:nvSpPr>
-          <p:cNvPr id="6" name="S13-cardtext130"/>
+          <p:cNvPr id="6" name="S13-cardtext123"/>
           <p:cNvSpPr txBox="1"/>
           <p:nvPr/>
         </p:nvSpPr>
@@ -6760,7 +6726,7 @@
       </p:sp>
       <p:sp>
         <p:nvSpPr>
-          <p:cNvPr id="7" name="S13-chip131"/>
+          <p:cNvPr id="7" name="S13-chip124"/>
           <p:cNvSpPr txBox="1"/>
           <p:nvPr/>
         </p:nvSpPr>
@@ -6807,7 +6773,7 @@
       </p:sp>
       <p:sp>
         <p:nvSpPr>
-          <p:cNvPr id="8" name="S13-text132"/>
+          <p:cNvPr id="8" name="S13-text125"/>
           <p:cNvSpPr txBox="1"/>
           <p:nvPr/>
         </p:nvSpPr>
@@ -6863,7 +6829,7 @@
       </p:sp>
       <p:sp>
         <p:nvSpPr>
-          <p:cNvPr id="9" name="S13-chip133"/>
+          <p:cNvPr id="9" name="S13-chip126"/>
           <p:cNvSpPr txBox="1"/>
           <p:nvPr/>
         </p:nvSpPr>
@@ -6910,7 +6876,7 @@
       </p:sp>
       <p:sp>
         <p:nvSpPr>
-          <p:cNvPr id="10" name="S13-text134"/>
+          <p:cNvPr id="10" name="S13-text127"/>
           <p:cNvSpPr txBox="1"/>
           <p:nvPr/>
         </p:nvSpPr>
@@ -7080,7 +7046,7 @@
       </p:sp>
       <p:sp>
         <p:nvSpPr>
-          <p:cNvPr id="3" name="S14-text135"/>
+          <p:cNvPr id="3" name="S14-text128"/>
           <p:cNvSpPr txBox="1"/>
           <p:nvPr/>
         </p:nvSpPr>
@@ -7119,7 +7085,7 @@
       </p:sp>
       <p:sp>
         <p:nvSpPr>
-          <p:cNvPr id="4" name="S14-card136"/>
+          <p:cNvPr id="4" name="S14-card129"/>
           <p:cNvSpPr/>
           <p:nvPr/>
         </p:nvSpPr>
@@ -7146,7 +7112,7 @@
       </p:sp>
       <p:sp>
         <p:nvSpPr>
-          <p:cNvPr id="5" name="S14-cardtext137"/>
+          <p:cNvPr id="5" name="S14-cardtext130"/>
           <p:cNvSpPr txBox="1"/>
           <p:nvPr/>
         </p:nvSpPr>
@@ -7188,7 +7154,7 @@
       </p:sp>
       <p:sp>
         <p:nvSpPr>
-          <p:cNvPr id="6" name="S14-chip138"/>
+          <p:cNvPr id="6" name="S14-chip131"/>
           <p:cNvSpPr txBox="1"/>
           <p:nvPr/>
         </p:nvSpPr>
@@ -7235,7 +7201,7 @@
       </p:sp>
       <p:sp>
         <p:nvSpPr>
-          <p:cNvPr id="7" name="S14-text139"/>
+          <p:cNvPr id="7" name="S14-text132"/>
           <p:cNvSpPr txBox="1"/>
           <p:nvPr/>
         </p:nvSpPr>
@@ -7274,7 +7240,7 @@
       </p:sp>
       <p:sp>
         <p:nvSpPr>
-          <p:cNvPr id="8" name="S14-chip140"/>
+          <p:cNvPr id="8" name="S14-chip133"/>
           <p:cNvSpPr txBox="1"/>
           <p:nvPr/>
         </p:nvSpPr>
@@ -7321,7 +7287,7 @@
       </p:sp>
       <p:sp>
         <p:nvSpPr>
-          <p:cNvPr id="9" name="S14-text141"/>
+          <p:cNvPr id="9" name="S14-text134"/>
           <p:cNvSpPr txBox="1"/>
           <p:nvPr/>
         </p:nvSpPr>
@@ -7360,7 +7326,7 @@
       </p:sp>
       <p:sp>
         <p:nvSpPr>
-          <p:cNvPr id="10" name="S14-chip142"/>
+          <p:cNvPr id="10" name="S14-chip135"/>
           <p:cNvSpPr txBox="1"/>
           <p:nvPr/>
         </p:nvSpPr>
@@ -7407,7 +7373,7 @@
       </p:sp>
       <p:sp>
         <p:nvSpPr>
-          <p:cNvPr id="11" name="S14-text143"/>
+          <p:cNvPr id="11" name="S14-text136"/>
           <p:cNvSpPr txBox="1"/>
           <p:nvPr/>
         </p:nvSpPr>
@@ -7560,7 +7526,7 @@
       </p:sp>
       <p:sp>
         <p:nvSpPr>
-          <p:cNvPr id="3" name="S15-chip144"/>
+          <p:cNvPr id="3" name="S15-chip137"/>
           <p:cNvSpPr txBox="1"/>
           <p:nvPr/>
         </p:nvSpPr>
@@ -7607,7 +7573,7 @@
       </p:sp>
       <p:sp>
         <p:nvSpPr>
-          <p:cNvPr id="4" name="S15-text145"/>
+          <p:cNvPr id="4" name="S15-text138"/>
           <p:cNvSpPr txBox="1"/>
           <p:nvPr/>
         </p:nvSpPr>
@@ -7663,7 +7629,7 @@
       </p:sp>
       <p:sp>
         <p:nvSpPr>
-          <p:cNvPr id="5" name="S15-chip146"/>
+          <p:cNvPr id="5" name="S15-chip139"/>
           <p:cNvSpPr txBox="1"/>
           <p:nvPr/>
         </p:nvSpPr>
@@ -7710,7 +7676,7 @@
       </p:sp>
       <p:sp>
         <p:nvSpPr>
-          <p:cNvPr id="6" name="S15-text147"/>
+          <p:cNvPr id="6" name="S15-text140"/>
           <p:cNvSpPr txBox="1"/>
           <p:nvPr/>
         </p:nvSpPr>
@@ -7766,7 +7732,7 @@
       </p:sp>
       <p:sp>
         <p:nvSpPr>
-          <p:cNvPr id="7" name="S15-chip148"/>
+          <p:cNvPr id="7" name="S15-chip141"/>
           <p:cNvSpPr txBox="1"/>
           <p:nvPr/>
         </p:nvSpPr>
@@ -7813,7 +7779,7 @@
       </p:sp>
       <p:sp>
         <p:nvSpPr>
-          <p:cNvPr id="8" name="S15-text149"/>
+          <p:cNvPr id="8" name="S15-text142"/>
           <p:cNvSpPr txBox="1"/>
           <p:nvPr/>
         </p:nvSpPr>
@@ -7869,7 +7835,7 @@
       </p:sp>
       <p:sp>
         <p:nvSpPr>
-          <p:cNvPr id="9" name="S15-chip150"/>
+          <p:cNvPr id="9" name="S15-chip143"/>
           <p:cNvSpPr txBox="1"/>
           <p:nvPr/>
         </p:nvSpPr>
@@ -7916,7 +7882,7 @@
       </p:sp>
       <p:sp>
         <p:nvSpPr>
-          <p:cNvPr id="10" name="S15-text151"/>
+          <p:cNvPr id="10" name="S15-text144"/>
           <p:cNvSpPr txBox="1"/>
           <p:nvPr/>
         </p:nvSpPr>
@@ -8086,7 +8052,7 @@
       </p:sp>
       <p:sp>
         <p:nvSpPr>
-          <p:cNvPr id="3" name="S16-card152"/>
+          <p:cNvPr id="3" name="S16-card145"/>
           <p:cNvSpPr/>
           <p:nvPr/>
         </p:nvSpPr>
@@ -8113,7 +8079,7 @@
       </p:sp>
       <p:sp>
         <p:nvSpPr>
-          <p:cNvPr id="4" name="S16-cardtext153"/>
+          <p:cNvPr id="4" name="S16-cardtext146"/>
           <p:cNvSpPr txBox="1"/>
           <p:nvPr/>
         </p:nvSpPr>
@@ -8155,7 +8121,7 @@
       </p:sp>
       <p:sp>
         <p:nvSpPr>
-          <p:cNvPr id="5" name="S16-chip154"/>
+          <p:cNvPr id="5" name="S16-chip147"/>
           <p:cNvSpPr txBox="1"/>
           <p:nvPr/>
         </p:nvSpPr>
@@ -8202,7 +8168,7 @@
       </p:sp>
       <p:sp>
         <p:nvSpPr>
-          <p:cNvPr id="6" name="S16-text155"/>
+          <p:cNvPr id="6" name="S16-text148"/>
           <p:cNvSpPr txBox="1"/>
           <p:nvPr/>
         </p:nvSpPr>
@@ -8241,7 +8207,7 @@
       </p:sp>
       <p:sp>
         <p:nvSpPr>
-          <p:cNvPr id="7" name="S16-text156"/>
+          <p:cNvPr id="7" name="S16-text149"/>
           <p:cNvSpPr txBox="1"/>
           <p:nvPr/>
         </p:nvSpPr>
@@ -8280,7 +8246,7 @@
       </p:sp>
       <p:sp>
         <p:nvSpPr>
-          <p:cNvPr id="8" name="S16-text157"/>
+          <p:cNvPr id="8" name="S16-text150"/>
           <p:cNvSpPr txBox="1"/>
           <p:nvPr/>
         </p:nvSpPr>
@@ -8319,7 +8285,7 @@
       </p:sp>
       <p:sp>
         <p:nvSpPr>
-          <p:cNvPr id="9" name="S16-text158"/>
+          <p:cNvPr id="9" name="S16-text151"/>
           <p:cNvSpPr txBox="1"/>
           <p:nvPr/>
         </p:nvSpPr>
@@ -8358,7 +8324,7 @@
       </p:sp>
       <p:sp>
         <p:nvSpPr>
-          <p:cNvPr id="10" name="S16-text159"/>
+          <p:cNvPr id="10" name="S16-text152"/>
           <p:cNvSpPr txBox="1"/>
           <p:nvPr/>
         </p:nvSpPr>
@@ -8397,7 +8363,7 @@
       </p:sp>
       <p:sp>
         <p:nvSpPr>
-          <p:cNvPr id="11" name="S16-text160"/>
+          <p:cNvPr id="11" name="S16-text153"/>
           <p:cNvSpPr txBox="1"/>
           <p:nvPr/>
         </p:nvSpPr>
@@ -8436,7 +8402,7 @@
       </p:sp>
       <p:sp>
         <p:nvSpPr>
-          <p:cNvPr id="12" name="S16-text161"/>
+          <p:cNvPr id="12" name="S16-text154"/>
           <p:cNvSpPr txBox="1"/>
           <p:nvPr/>
         </p:nvSpPr>
@@ -8475,7 +8441,7 @@
       </p:sp>
       <p:sp>
         <p:nvSpPr>
-          <p:cNvPr id="13" name="S16-chip162"/>
+          <p:cNvPr id="13" name="S16-chip155"/>
           <p:cNvSpPr txBox="1"/>
           <p:nvPr/>
         </p:nvSpPr>
@@ -8522,7 +8488,7 @@
       </p:sp>
       <p:sp>
         <p:nvSpPr>
-          <p:cNvPr id="14" name="S16-text163"/>
+          <p:cNvPr id="14" name="S16-text156"/>
           <p:cNvSpPr txBox="1"/>
           <p:nvPr/>
         </p:nvSpPr>
@@ -8561,7 +8527,7 @@
       </p:sp>
       <p:sp>
         <p:nvSpPr>
-          <p:cNvPr id="15" name="S16-text164"/>
+          <p:cNvPr id="15" name="S16-text157"/>
           <p:cNvSpPr txBox="1"/>
           <p:nvPr/>
         </p:nvSpPr>
@@ -8617,7 +8583,7 @@
       </p:sp>
       <p:sp>
         <p:nvSpPr>
-          <p:cNvPr id="16" name="S16-text165"/>
+          <p:cNvPr id="16" name="S16-text158"/>
           <p:cNvSpPr txBox="1"/>
           <p:nvPr/>
         </p:nvSpPr>
@@ -8656,7 +8622,7 @@
       </p:sp>
       <p:sp>
         <p:nvSpPr>
-          <p:cNvPr id="17" name="S16-text166"/>
+          <p:cNvPr id="17" name="S16-text159"/>
           <p:cNvSpPr txBox="1"/>
           <p:nvPr/>
         </p:nvSpPr>
@@ -8826,7 +8792,7 @@
       </p:sp>
       <p:sp>
         <p:nvSpPr>
-          <p:cNvPr id="3" name="S17-text167"/>
+          <p:cNvPr id="3" name="S17-text160"/>
           <p:cNvSpPr txBox="1"/>
           <p:nvPr/>
         </p:nvSpPr>
@@ -8865,7 +8831,7 @@
       </p:sp>
       <p:sp>
         <p:nvSpPr>
-          <p:cNvPr id="4" name="S17-card168"/>
+          <p:cNvPr id="4" name="S17-card161"/>
           <p:cNvSpPr/>
           <p:nvPr/>
         </p:nvSpPr>
@@ -8892,7 +8858,7 @@
       </p:sp>
       <p:sp>
         <p:nvSpPr>
-          <p:cNvPr id="5" name="S17-cardtext169"/>
+          <p:cNvPr id="5" name="S17-cardtext162"/>
           <p:cNvSpPr txBox="1"/>
           <p:nvPr/>
         </p:nvSpPr>
@@ -8934,7 +8900,7 @@
       </p:sp>
       <p:sp>
         <p:nvSpPr>
-          <p:cNvPr id="6" name="S17-chip170"/>
+          <p:cNvPr id="6" name="S17-chip163"/>
           <p:cNvSpPr txBox="1"/>
           <p:nvPr/>
         </p:nvSpPr>
@@ -8981,7 +8947,7 @@
       </p:sp>
       <p:sp>
         <p:nvSpPr>
-          <p:cNvPr id="7" name="S17-card171"/>
+          <p:cNvPr id="7" name="S17-card164"/>
           <p:cNvSpPr/>
           <p:nvPr/>
         </p:nvSpPr>
@@ -9008,7 +8974,7 @@
       </p:sp>
       <p:sp>
         <p:nvSpPr>
-          <p:cNvPr id="8" name="S17-cardtext172"/>
+          <p:cNvPr id="8" name="S17-cardtext165"/>
           <p:cNvSpPr txBox="1"/>
           <p:nvPr/>
         </p:nvSpPr>
@@ -9070,7 +9036,7 @@
       </p:sp>
       <p:sp>
         <p:nvSpPr>
-          <p:cNvPr id="9" name="S17-chip173"/>
+          <p:cNvPr id="9" name="S17-chip166"/>
           <p:cNvSpPr txBox="1"/>
           <p:nvPr/>
         </p:nvSpPr>
@@ -9117,7 +9083,7 @@
       </p:sp>
       <p:sp>
         <p:nvSpPr>
-          <p:cNvPr id="10" name="S17-card174"/>
+          <p:cNvPr id="10" name="S17-card167"/>
           <p:cNvSpPr/>
           <p:nvPr/>
         </p:nvSpPr>
@@ -9144,7 +9110,7 @@
       </p:sp>
       <p:sp>
         <p:nvSpPr>
-          <p:cNvPr id="11" name="S17-cardtext175"/>
+          <p:cNvPr id="11" name="S17-cardtext168"/>
           <p:cNvSpPr txBox="1"/>
           <p:nvPr/>
         </p:nvSpPr>
@@ -9206,7 +9172,7 @@
       </p:sp>
       <p:sp>
         <p:nvSpPr>
-          <p:cNvPr id="12" name="S17-chip176"/>
+          <p:cNvPr id="12" name="S17-chip169"/>
           <p:cNvSpPr txBox="1"/>
           <p:nvPr/>
         </p:nvSpPr>
@@ -9253,7 +9219,7 @@
       </p:sp>
       <p:sp>
         <p:nvSpPr>
-          <p:cNvPr id="13" name="S17-card177"/>
+          <p:cNvPr id="13" name="S17-card170"/>
           <p:cNvSpPr/>
           <p:nvPr/>
         </p:nvSpPr>
@@ -9280,7 +9246,7 @@
       </p:sp>
       <p:sp>
         <p:nvSpPr>
-          <p:cNvPr id="14" name="S17-cardtext178"/>
+          <p:cNvPr id="14" name="S17-cardtext171"/>
           <p:cNvSpPr txBox="1"/>
           <p:nvPr/>
         </p:nvSpPr>
@@ -9456,7 +9422,7 @@
       </p:sp>
       <p:sp>
         <p:nvSpPr>
-          <p:cNvPr id="3" name="S18-card179"/>
+          <p:cNvPr id="3" name="S18-card172"/>
           <p:cNvSpPr/>
           <p:nvPr/>
         </p:nvSpPr>
@@ -9483,7 +9449,7 @@
       </p:sp>
       <p:sp>
         <p:nvSpPr>
-          <p:cNvPr id="4" name="S18-cardtext180"/>
+          <p:cNvPr id="4" name="S18-cardtext173"/>
           <p:cNvSpPr txBox="1"/>
           <p:nvPr/>
         </p:nvSpPr>
@@ -9545,7 +9511,7 @@
       </p:sp>
       <p:sp>
         <p:nvSpPr>
-          <p:cNvPr id="5" name="S18-chip181"/>
+          <p:cNvPr id="5" name="S18-chip174"/>
           <p:cNvSpPr txBox="1"/>
           <p:nvPr/>
         </p:nvSpPr>
@@ -9592,7 +9558,7 @@
       </p:sp>
       <p:sp>
         <p:nvSpPr>
-          <p:cNvPr id="6" name="S18-chip182"/>
+          <p:cNvPr id="6" name="S18-chip175"/>
           <p:cNvSpPr txBox="1"/>
           <p:nvPr/>
         </p:nvSpPr>
@@ -9639,7 +9605,7 @@
       </p:sp>
       <p:sp>
         <p:nvSpPr>
-          <p:cNvPr id="7" name="S18-text183"/>
+          <p:cNvPr id="7" name="S18-text176"/>
           <p:cNvSpPr txBox="1"/>
           <p:nvPr/>
         </p:nvSpPr>
@@ -9678,7 +9644,7 @@
       </p:sp>
       <p:sp>
         <p:nvSpPr>
-          <p:cNvPr id="8" name="S18-text184"/>
+          <p:cNvPr id="8" name="S18-text177"/>
           <p:cNvSpPr txBox="1"/>
           <p:nvPr/>
         </p:nvSpPr>
@@ -9734,7 +9700,7 @@
       </p:sp>
       <p:sp>
         <p:nvSpPr>
-          <p:cNvPr id="9" name="S18-text185"/>
+          <p:cNvPr id="9" name="S18-text178"/>
           <p:cNvSpPr txBox="1"/>
           <p:nvPr/>
         </p:nvSpPr>
@@ -9790,7 +9756,7 @@
       </p:sp>
       <p:sp>
         <p:nvSpPr>
-          <p:cNvPr id="10" name="S18-text186"/>
+          <p:cNvPr id="10" name="S18-text179"/>
           <p:cNvSpPr txBox="1"/>
           <p:nvPr/>
         </p:nvSpPr>
@@ -9846,7 +9812,7 @@
       </p:sp>
       <p:sp>
         <p:nvSpPr>
-          <p:cNvPr id="11" name="S18-text187"/>
+          <p:cNvPr id="11" name="S18-text180"/>
           <p:cNvSpPr txBox="1"/>
           <p:nvPr/>
         </p:nvSpPr>
@@ -9999,7 +9965,7 @@
       </p:sp>
       <p:sp>
         <p:nvSpPr>
-          <p:cNvPr id="3" name="S19-text188"/>
+          <p:cNvPr id="3" name="S19-text181"/>
           <p:cNvSpPr txBox="1"/>
           <p:nvPr/>
         </p:nvSpPr>
@@ -10038,7 +10004,7 @@
       </p:sp>
       <p:sp>
         <p:nvSpPr>
-          <p:cNvPr id="4" name="S19-card189"/>
+          <p:cNvPr id="4" name="S19-card182"/>
           <p:cNvSpPr/>
           <p:nvPr/>
         </p:nvSpPr>
@@ -10065,7 +10031,7 @@
       </p:sp>
       <p:sp>
         <p:nvSpPr>
-          <p:cNvPr id="5" name="S19-cardtext190"/>
+          <p:cNvPr id="5" name="S19-cardtext183"/>
           <p:cNvSpPr txBox="1"/>
           <p:nvPr/>
         </p:nvSpPr>
@@ -10107,7 +10073,7 @@
       </p:sp>
       <p:sp>
         <p:nvSpPr>
-          <p:cNvPr id="6" name="S19-card191"/>
+          <p:cNvPr id="6" name="S19-card184"/>
           <p:cNvSpPr/>
           <p:nvPr/>
         </p:nvSpPr>
@@ -10134,7 +10100,7 @@
       </p:sp>
       <p:sp>
         <p:nvSpPr>
-          <p:cNvPr id="7" name="S19-cardtext192"/>
+          <p:cNvPr id="7" name="S19-cardtext185"/>
           <p:cNvSpPr txBox="1"/>
           <p:nvPr/>
         </p:nvSpPr>
@@ -10196,7 +10162,7 @@
       </p:sp>
       <p:sp>
         <p:nvSpPr>
-          <p:cNvPr id="8" name="S19-card193"/>
+          <p:cNvPr id="8" name="S19-card186"/>
           <p:cNvSpPr/>
           <p:nvPr/>
         </p:nvSpPr>
@@ -10223,7 +10189,7 @@
       </p:sp>
       <p:sp>
         <p:nvSpPr>
-          <p:cNvPr id="9" name="S19-cardtext194"/>
+          <p:cNvPr id="9" name="S19-cardtext187"/>
           <p:cNvSpPr txBox="1"/>
           <p:nvPr/>
         </p:nvSpPr>
@@ -10285,7 +10251,7 @@
       </p:sp>
       <p:sp>
         <p:nvSpPr>
-          <p:cNvPr id="10" name="S19-card195"/>
+          <p:cNvPr id="10" name="S19-card188"/>
           <p:cNvSpPr/>
           <p:nvPr/>
         </p:nvSpPr>
@@ -10312,7 +10278,7 @@
       </p:sp>
       <p:sp>
         <p:nvSpPr>
-          <p:cNvPr id="11" name="S19-cardtext196"/>
+          <p:cNvPr id="11" name="S19-cardtext189"/>
           <p:cNvSpPr txBox="1"/>
           <p:nvPr/>
         </p:nvSpPr>
@@ -10394,7 +10360,7 @@
       </p:sp>
       <p:sp>
         <p:nvSpPr>
-          <p:cNvPr id="12" name="S19-card197"/>
+          <p:cNvPr id="12" name="S19-card190"/>
           <p:cNvSpPr/>
           <p:nvPr/>
         </p:nvSpPr>
@@ -10421,7 +10387,7 @@
       </p:sp>
       <p:sp>
         <p:nvSpPr>
-          <p:cNvPr id="13" name="S19-cardtext198"/>
+          <p:cNvPr id="13" name="S19-cardtext191"/>
           <p:cNvSpPr txBox="1"/>
           <p:nvPr/>
         </p:nvSpPr>
@@ -12326,14 +12292,14 @@
       </p:sp>
       <p:sp>
         <p:nvSpPr>
-          <p:cNvPr id="5" name="S05-figure39" descr="왼쪽: 비닐 랩으로 싼 막대자석. 오른쪽: 그릇 위에 올린 체(구멍이 있는 망)"/>
+          <p:cNvPr id="5" name="S05-figure39" descr="왼쪽: 비닐 랩(점선)으로 싼 막대자석. 오른쪽: 그릇 위에 올린 체(구멍이 있는 망)"/>
           <p:cNvSpPr/>
           <p:nvPr/>
         </p:nvSpPr>
         <p:spPr>
           <a:xfrm>
-            <a:off x="7823934" y="2005995"/>
-            <a:ext cx="350762" cy="210457"/>
+            <a:off x="7059996" y="2065038"/>
+            <a:ext cx="541747" cy="325048"/>
           </a:xfrm>
           <a:custGeom>
             <a:avLst/>
@@ -12342,15 +12308,15 @@
             <a:cxnLst/>
             <a:rect l="l" t="t" r="r" b="b"/>
             <a:pathLst>
-              <a:path w="350762" h="210457">
+              <a:path w="541747" h="325048">
                 <a:moveTo>
-                  <a:pt x="0" y="210457"/>
+                  <a:pt x="0" y="325048"/>
                 </a:moveTo>
                 <a:lnTo>
-                  <a:pt x="350762" y="210457"/>
+                  <a:pt x="541747" y="325048"/>
                 </a:lnTo>
                 <a:lnTo>
-                  <a:pt x="350762" y="0"/>
+                  <a:pt x="541747" y="0"/>
                 </a:lnTo>
                 <a:lnTo>
                   <a:pt x="0" y="0"/>
@@ -12378,8 +12344,8 @@
         </p:nvSpPr>
         <p:spPr>
           <a:xfrm>
-            <a:off x="8174696" y="2005995"/>
-            <a:ext cx="350762" cy="210457"/>
+            <a:off x="7601742" y="2065038"/>
+            <a:ext cx="541747" cy="325048"/>
           </a:xfrm>
           <a:custGeom>
             <a:avLst/>
@@ -12388,15 +12354,15 @@
             <a:cxnLst/>
             <a:rect l="l" t="t" r="r" b="b"/>
             <a:pathLst>
-              <a:path w="350762" h="210457">
+              <a:path w="541747" h="325048">
                 <a:moveTo>
-                  <a:pt x="0" y="210457"/>
+                  <a:pt x="0" y="325048"/>
                 </a:moveTo>
                 <a:lnTo>
-                  <a:pt x="350762" y="210457"/>
+                  <a:pt x="541747" y="325048"/>
                 </a:lnTo>
                 <a:lnTo>
-                  <a:pt x="350762" y="0"/>
+                  <a:pt x="541747" y="0"/>
                 </a:lnTo>
                 <a:lnTo>
                   <a:pt x="0" y="0"/>
@@ -12424,8 +12390,8 @@
         </p:nvSpPr>
         <p:spPr>
           <a:xfrm>
-            <a:off x="7771320" y="1953381"/>
-            <a:ext cx="806752" cy="315686"/>
+            <a:off x="6978734" y="1983776"/>
+            <a:ext cx="1246017" cy="487572"/>
           </a:xfrm>
           <a:custGeom>
             <a:avLst/>
@@ -12434,15 +12400,15 @@
             <a:cxnLst/>
             <a:rect l="l" t="t" r="r" b="b"/>
             <a:pathLst>
-              <a:path w="806752" h="315686">
+              <a:path w="1246017" h="487572">
                 <a:moveTo>
-                  <a:pt x="0" y="315686"/>
+                  <a:pt x="0" y="487572"/>
                 </a:moveTo>
                 <a:lnTo>
-                  <a:pt x="806752" y="315686"/>
+                  <a:pt x="1246017" y="487572"/>
                 </a:lnTo>
                 <a:lnTo>
-                  <a:pt x="806752" y="0"/>
+                  <a:pt x="1246017" y="0"/>
                 </a:lnTo>
                 <a:lnTo>
                   <a:pt x="0" y="0"/>
@@ -12468,8 +12434,8 @@
         </p:nvSpPr>
         <p:spPr>
           <a:xfrm>
-            <a:off x="9226982" y="2251529"/>
-            <a:ext cx="1122438" cy="420914"/>
+            <a:off x="9226982" y="2281737"/>
+            <a:ext cx="1733589" cy="541747"/>
           </a:xfrm>
           <a:custGeom>
             <a:avLst/>
@@ -12478,81 +12444,81 @@
             <a:cxnLst/>
             <a:rect l="l" t="t" r="r" b="b"/>
             <a:pathLst>
-              <a:path w="1122438" h="420914">
+              <a:path w="1733589" h="541747">
                 <a:moveTo>
                   <a:pt x="0" y="0"/>
                 </a:moveTo>
                 <a:lnTo>
-                  <a:pt x="4911" y="55070"/>
+                  <a:pt x="7584" y="70969"/>
                 </a:lnTo>
                 <a:lnTo>
-                  <a:pt x="19292" y="109087"/>
+                  <a:pt x="29796" y="140312"/>
                 </a:lnTo>
                 <a:lnTo>
-                  <a:pt x="42793" y="161000"/>
+                  <a:pt x="66093" y="207489"/>
                 </a:lnTo>
                 <a:lnTo>
-                  <a:pt x="75063" y="210457"/>
+                  <a:pt x="115934" y="270873"/>
                 </a:lnTo>
                 <a:lnTo>
-                  <a:pt x="116102" y="256407"/>
+                  <a:pt x="179318" y="329924"/>
                 </a:lnTo>
                 <a:lnTo>
-                  <a:pt x="164507" y="297797"/>
+                  <a:pt x="254079" y="383015"/>
                 </a:lnTo>
                 <a:lnTo>
-                  <a:pt x="219577" y="333925"/>
+                  <a:pt x="339133" y="429605"/>
                 </a:lnTo>
                 <a:lnTo>
-                  <a:pt x="280610" y="364442"/>
+                  <a:pt x="433397" y="469153"/>
                 </a:lnTo>
                 <a:lnTo>
-                  <a:pt x="346553" y="388995"/>
+                  <a:pt x="535246" y="500574"/>
                 </a:lnTo>
                 <a:lnTo>
-                  <a:pt x="416004" y="406533"/>
+                  <a:pt x="642511" y="523327"/>
                 </a:lnTo>
                 <a:lnTo>
-                  <a:pt x="487910" y="417407"/>
+                  <a:pt x="753569" y="536871"/>
                 </a:lnTo>
                 <a:lnTo>
-                  <a:pt x="561219" y="420914"/>
+                  <a:pt x="866794" y="541747"/>
                 </a:lnTo>
                 <a:lnTo>
-                  <a:pt x="634528" y="417407"/>
+                  <a:pt x="980020" y="536871"/>
                 </a:lnTo>
                 <a:lnTo>
-                  <a:pt x="706434" y="406533"/>
+                  <a:pt x="1091078" y="523327"/>
                 </a:lnTo>
                 <a:lnTo>
-                  <a:pt x="775885" y="388995"/>
+                  <a:pt x="1198343" y="500574"/>
                 </a:lnTo>
                 <a:lnTo>
-                  <a:pt x="841829" y="364442"/>
+                  <a:pt x="1300192" y="469153"/>
                 </a:lnTo>
                 <a:lnTo>
-                  <a:pt x="902861" y="333925"/>
+                  <a:pt x="1394456" y="429605"/>
                 </a:lnTo>
                 <a:lnTo>
-                  <a:pt x="957931" y="297797"/>
+                  <a:pt x="1479510" y="383015"/>
                 </a:lnTo>
                 <a:lnTo>
-                  <a:pt x="1006336" y="256407"/>
+                  <a:pt x="1554271" y="329924"/>
                 </a:lnTo>
                 <a:lnTo>
-                  <a:pt x="1047375" y="210457"/>
+                  <a:pt x="1617655" y="270873"/>
                 </a:lnTo>
                 <a:lnTo>
-                  <a:pt x="1079645" y="161000"/>
+                  <a:pt x="1667496" y="207489"/>
                 </a:lnTo>
                 <a:lnTo>
-                  <a:pt x="1103146" y="109087"/>
+                  <a:pt x="1703793" y="140312"/>
                 </a:lnTo>
                 <a:lnTo>
-                  <a:pt x="1117527" y="55070"/>
+                  <a:pt x="1726005" y="70969"/>
                 </a:lnTo>
                 <a:lnTo>
-                  <a:pt x="1122438" y="0"/>
+                  <a:pt x="1733589" y="0"/>
                 </a:lnTo>
                 <a:close/>
               </a:path>
@@ -12577,8 +12543,8 @@
         </p:nvSpPr>
         <p:spPr>
           <a:xfrm>
-            <a:off x="9349748" y="1900767"/>
-            <a:ext cx="876905" cy="350762"/>
+            <a:off x="9416593" y="1929601"/>
+            <a:ext cx="1354366" cy="460485"/>
           </a:xfrm>
           <a:custGeom>
             <a:avLst/>
@@ -12587,81 +12553,81 @@
             <a:cxnLst/>
             <a:rect l="l" t="t" r="r" b="b"/>
             <a:pathLst>
-              <a:path w="876905" h="350762">
+              <a:path w="1354366" h="460485">
                 <a:moveTo>
                   <a:pt x="0" y="0"/>
                 </a:moveTo>
                 <a:lnTo>
-                  <a:pt x="3858" y="45950"/>
+                  <a:pt x="5959" y="60134"/>
                 </a:lnTo>
                 <a:lnTo>
-                  <a:pt x="15083" y="90847"/>
+                  <a:pt x="23295" y="119184"/>
                 </a:lnTo>
                 <a:lnTo>
-                  <a:pt x="33322" y="134342"/>
+                  <a:pt x="51466" y="176068"/>
                 </a:lnTo>
                 <a:lnTo>
-                  <a:pt x="58577" y="175381"/>
+                  <a:pt x="90472" y="230242"/>
                 </a:lnTo>
                 <a:lnTo>
-                  <a:pt x="90497" y="213614"/>
+                  <a:pt x="139771" y="280083"/>
                 </a:lnTo>
                 <a:lnTo>
-                  <a:pt x="128379" y="247989"/>
+                  <a:pt x="198279" y="325590"/>
                 </a:lnTo>
                 <a:lnTo>
-                  <a:pt x="171523" y="278154"/>
+                  <a:pt x="264914" y="365137"/>
                 </a:lnTo>
                 <a:lnTo>
-                  <a:pt x="219226" y="303760"/>
+                  <a:pt x="338592" y="398725"/>
                 </a:lnTo>
                 <a:lnTo>
-                  <a:pt x="270788" y="324104"/>
+                  <a:pt x="418228" y="425271"/>
                 </a:lnTo>
                 <a:lnTo>
-                  <a:pt x="324806" y="338836"/>
+                  <a:pt x="501657" y="444774"/>
                 </a:lnTo>
                 <a:lnTo>
-                  <a:pt x="381278" y="347605"/>
+                  <a:pt x="588879" y="456692"/>
                 </a:lnTo>
                 <a:lnTo>
-                  <a:pt x="438452" y="350762"/>
+                  <a:pt x="677183" y="460485"/>
                 </a:lnTo>
                 <a:lnTo>
-                  <a:pt x="495627" y="347605"/>
+                  <a:pt x="765488" y="456692"/>
                 </a:lnTo>
                 <a:lnTo>
-                  <a:pt x="552099" y="338836"/>
+                  <a:pt x="852709" y="444774"/>
                 </a:lnTo>
                 <a:lnTo>
-                  <a:pt x="606117" y="324104"/>
+                  <a:pt x="936138" y="425271"/>
                 </a:lnTo>
                 <a:lnTo>
-                  <a:pt x="657679" y="303760"/>
+                  <a:pt x="1015775" y="398725"/>
                 </a:lnTo>
                 <a:lnTo>
-                  <a:pt x="705382" y="278154"/>
+                  <a:pt x="1089452" y="365137"/>
                 </a:lnTo>
                 <a:lnTo>
-                  <a:pt x="748526" y="247989"/>
+                  <a:pt x="1156087" y="325590"/>
                 </a:lnTo>
                 <a:lnTo>
-                  <a:pt x="786408" y="213614"/>
+                  <a:pt x="1214596" y="280083"/>
                 </a:lnTo>
                 <a:lnTo>
-                  <a:pt x="818328" y="175381"/>
+                  <a:pt x="1263895" y="230242"/>
                 </a:lnTo>
                 <a:lnTo>
-                  <a:pt x="843582" y="134342"/>
+                  <a:pt x="1302900" y="176068"/>
                 </a:lnTo>
                 <a:lnTo>
-                  <a:pt x="861822" y="90847"/>
+                  <a:pt x="1331071" y="119184"/>
                 </a:lnTo>
                 <a:lnTo>
-                  <a:pt x="873046" y="45950"/>
+                  <a:pt x="1348407" y="60134"/>
                 </a:lnTo>
                 <a:lnTo>
-                  <a:pt x="876905" y="0"/>
+                  <a:pt x="1354366" y="0"/>
                 </a:lnTo>
                 <a:close/>
               </a:path>
@@ -12684,8 +12650,8 @@
         </p:nvSpPr>
         <p:spPr>
           <a:xfrm>
-            <a:off x="9525129" y="1900767"/>
-            <a:ext cx="0" cy="280610"/>
+            <a:off x="9687466" y="1929601"/>
+            <a:ext cx="0" cy="368388"/>
           </a:xfrm>
           <a:prstGeom prst="line">
             <a:avLst/>
@@ -12707,8 +12673,8 @@
         </p:nvSpPr>
         <p:spPr>
           <a:xfrm>
-            <a:off x="9700510" y="1900767"/>
-            <a:ext cx="0" cy="343747"/>
+            <a:off x="9958340" y="1929601"/>
+            <a:ext cx="0" cy="451275"/>
           </a:xfrm>
           <a:prstGeom prst="line">
             <a:avLst/>
@@ -12730,8 +12696,8 @@
         </p:nvSpPr>
         <p:spPr>
           <a:xfrm>
-            <a:off x="9875891" y="1900767"/>
-            <a:ext cx="0" cy="343747"/>
+            <a:off x="10229213" y="1929601"/>
+            <a:ext cx="0" cy="451275"/>
           </a:xfrm>
           <a:prstGeom prst="line">
             <a:avLst/>
@@ -12753,8 +12719,8 @@
         </p:nvSpPr>
         <p:spPr>
           <a:xfrm>
-            <a:off x="10051272" y="1900767"/>
-            <a:ext cx="0" cy="280610"/>
+            <a:off x="10500086" y="1929601"/>
+            <a:ext cx="0" cy="368388"/>
           </a:xfrm>
           <a:prstGeom prst="line">
             <a:avLst/>
@@ -12776,8 +12742,8 @@
         </p:nvSpPr>
         <p:spPr>
           <a:xfrm>
-            <a:off x="9454977" y="2128762"/>
-            <a:ext cx="666448" cy="0"/>
+            <a:off x="9577492" y="2227562"/>
+            <a:ext cx="1032569" cy="0"/>
           </a:xfrm>
           <a:prstGeom prst="line">
             <a:avLst/>
@@ -12799,8 +12765,8 @@
         </p:nvSpPr>
         <p:spPr>
           <a:xfrm>
-            <a:off x="9377459" y="2023533"/>
-            <a:ext cx="821484" cy="0"/>
+            <a:off x="9451807" y="2075873"/>
+            <a:ext cx="1283939" cy="0"/>
           </a:xfrm>
           <a:prstGeom prst="line">
             <a:avLst/>
@@ -12822,8 +12788,8 @@
         </p:nvSpPr>
         <p:spPr>
           <a:xfrm>
-            <a:off x="9349748" y="1900767"/>
-            <a:ext cx="876905" cy="0"/>
+            <a:off x="9416593" y="1929601"/>
+            <a:ext cx="1354366" cy="0"/>
           </a:xfrm>
           <a:prstGeom prst="line">
             <a:avLst/>
@@ -12845,8 +12811,8 @@
         </p:nvSpPr>
         <p:spPr>
           <a:xfrm flipV="1">
-            <a:off x="10226653" y="1795538"/>
-            <a:ext cx="473529" cy="105229"/>
+            <a:off x="10770959" y="1767077"/>
+            <a:ext cx="731358" cy="162524"/>
           </a:xfrm>
           <a:prstGeom prst="line">
             <a:avLst/>
@@ -12868,8 +12834,8 @@
         </p:nvSpPr>
         <p:spPr>
           <a:xfrm>
-            <a:off x="7852249" y="1936599"/>
-            <a:ext cx="294132" cy="349250"/>
+            <a:off x="7273066" y="1484103"/>
+            <a:ext cx="657352" cy="349250"/>
           </a:xfrm>
           <a:prstGeom prst="rect">
             <a:avLst/>
@@ -12885,7 +12851,7 @@
               <a:buNone/>
             </a:pPr>
             <a:r>
-              <a:rPr lang="en-US" altLang="ko-KR" sz="2200" b="1" dirty="0">
+              <a:rPr lang="ko-KR" altLang="en-US" sz="2200" b="1" dirty="0">
                 <a:solidFill>
                   <a:srgbClr val="1F2937"/>
                 </a:solidFill>
@@ -12893,7 +12859,7 @@
                 <a:ea typeface="맑은 고딕" pitchFamily="34" charset="-122"/>
                 <a:cs typeface="맑은 고딕" pitchFamily="34" charset="-120"/>
               </a:rPr>
-              <a:t>N</a:t>
+              <a:t>자석</a:t>
             </a:r>
             <a:endParaRPr lang="ko-KR" sz="2200" dirty="0"/>
           </a:p>
@@ -12907,8 +12873,8 @@
         </p:nvSpPr>
         <p:spPr>
           <a:xfrm>
-            <a:off x="8203011" y="1936599"/>
-            <a:ext cx="294132" cy="349250"/>
+            <a:off x="9902006" y="1457016"/>
+            <a:ext cx="383540" cy="349250"/>
           </a:xfrm>
           <a:prstGeom prst="rect">
             <a:avLst/>
@@ -12924,7 +12890,7 @@
               <a:buNone/>
             </a:pPr>
             <a:r>
-              <a:rPr lang="en-US" altLang="ko-KR" sz="2200" b="1" dirty="0">
+              <a:rPr lang="ko-KR" altLang="en-US" sz="2200" b="1" dirty="0">
                 <a:solidFill>
                   <a:srgbClr val="1F2937"/>
                 </a:solidFill>
@@ -12932,7 +12898,7 @@
                 <a:ea typeface="맑은 고딕" pitchFamily="34" charset="-122"/>
                 <a:cs typeface="맑은 고딕" pitchFamily="34" charset="-120"/>
               </a:rPr>
-              <a:t>S</a:t>
+              <a:t>체</a:t>
             </a:r>
             <a:endParaRPr lang="ko-KR" sz="2200" dirty="0"/>
           </a:p>
@@ -12940,124 +12906,7 @@
       </p:sp>
       <p:sp>
         <p:nvSpPr>
-          <p:cNvPr id="20" name="S05-label57"/>
-          <p:cNvSpPr txBox="1"/>
-          <p:nvPr/>
-        </p:nvSpPr>
-        <p:spPr>
-          <a:xfrm>
-            <a:off x="7214576" y="1533223"/>
-            <a:ext cx="1920240" cy="349250"/>
-          </a:xfrm>
-          <a:prstGeom prst="rect">
-            <a:avLst/>
-          </a:prstGeom>
-          <a:noFill/>
-          <a:ln/>
-        </p:spPr>
-        <p:txBody>
-          <a:bodyPr wrap="square" lIns="0" tIns="0" rIns="0" bIns="0" rtlCol="0" anchor="ctr"/>
-          <a:lstStyle/>
-          <a:p>
-            <a:pPr eaLnBrk="0" algn="ctr" indent="0" marL="0">
-              <a:buNone/>
-            </a:pPr>
-            <a:r>
-              <a:rPr lang="ko-KR" altLang="en-US" sz="2200" b="1" dirty="0">
-                <a:solidFill>
-                  <a:srgbClr val="1F2937"/>
-                </a:solidFill>
-                <a:latin typeface="맑은 고딕" pitchFamily="34" charset="0"/>
-                <a:ea typeface="맑은 고딕" pitchFamily="34" charset="-122"/>
-                <a:cs typeface="맑은 고딕" pitchFamily="34" charset="-120"/>
-              </a:rPr>
-              <a:t>랩으로 싼 자석</a:t>
-            </a:r>
-            <a:endParaRPr lang="ko-KR" sz="2200" dirty="0"/>
-          </a:p>
-        </p:txBody>
-      </p:sp>
-      <p:sp>
-        <p:nvSpPr>
-          <p:cNvPr id="21" name="S05-label59"/>
-          <p:cNvSpPr txBox="1"/>
-          <p:nvPr/>
-        </p:nvSpPr>
-        <p:spPr>
-          <a:xfrm>
-            <a:off x="9596431" y="1427994"/>
-            <a:ext cx="383540" cy="349250"/>
-          </a:xfrm>
-          <a:prstGeom prst="rect">
-            <a:avLst/>
-          </a:prstGeom>
-          <a:noFill/>
-          <a:ln/>
-        </p:spPr>
-        <p:txBody>
-          <a:bodyPr wrap="square" lIns="0" tIns="0" rIns="0" bIns="0" rtlCol="0" anchor="ctr"/>
-          <a:lstStyle/>
-          <a:p>
-            <a:pPr eaLnBrk="0" algn="ctr" indent="0" marL="0">
-              <a:buNone/>
-            </a:pPr>
-            <a:r>
-              <a:rPr lang="ko-KR" altLang="en-US" sz="2200" b="1" dirty="0">
-                <a:solidFill>
-                  <a:srgbClr val="1F2937"/>
-                </a:solidFill>
-                <a:latin typeface="맑은 고딕" pitchFamily="34" charset="0"/>
-                <a:ea typeface="맑은 고딕" pitchFamily="34" charset="-122"/>
-                <a:cs typeface="맑은 고딕" pitchFamily="34" charset="-120"/>
-              </a:rPr>
-              <a:t>체</a:t>
-            </a:r>
-            <a:endParaRPr lang="ko-KR" sz="2200" dirty="0"/>
-          </a:p>
-        </p:txBody>
-      </p:sp>
-      <p:sp>
-        <p:nvSpPr>
-          <p:cNvPr id="22" name="S05-label61"/>
-          <p:cNvSpPr txBox="1"/>
-          <p:nvPr/>
-        </p:nvSpPr>
-        <p:spPr>
-          <a:xfrm>
-            <a:off x="9459525" y="2620585"/>
-            <a:ext cx="657352" cy="349250"/>
-          </a:xfrm>
-          <a:prstGeom prst="rect">
-            <a:avLst/>
-          </a:prstGeom>
-          <a:noFill/>
-          <a:ln/>
-        </p:spPr>
-        <p:txBody>
-          <a:bodyPr wrap="square" lIns="0" tIns="0" rIns="0" bIns="0" rtlCol="0" anchor="ctr"/>
-          <a:lstStyle/>
-          <a:p>
-            <a:pPr eaLnBrk="0" algn="ctr" indent="0" marL="0">
-              <a:buNone/>
-            </a:pPr>
-            <a:r>
-              <a:rPr lang="ko-KR" altLang="en-US" sz="2200" b="1" dirty="0">
-                <a:solidFill>
-                  <a:srgbClr val="1F2937"/>
-                </a:solidFill>
-                <a:latin typeface="맑은 고딕" pitchFamily="34" charset="0"/>
-                <a:ea typeface="맑은 고딕" pitchFamily="34" charset="-122"/>
-                <a:cs typeface="맑은 고딕" pitchFamily="34" charset="-120"/>
-              </a:rPr>
-              <a:t>그릇</a:t>
-            </a:r>
-            <a:endParaRPr lang="ko-KR" sz="2200" dirty="0"/>
-          </a:p>
-        </p:txBody>
-      </p:sp>
-      <p:sp>
-        <p:nvSpPr>
-          <p:cNvPr id="23" name="S05-card62"/>
+          <p:cNvPr id="20" name="S05-card56"/>
           <p:cNvSpPr/>
           <p:nvPr/>
         </p:nvSpPr>
@@ -13084,7 +12933,7 @@
       </p:sp>
       <p:sp>
         <p:nvSpPr>
-          <p:cNvPr id="24" name="S05-cardtext63"/>
+          <p:cNvPr id="21" name="S05-cardtext57"/>
           <p:cNvSpPr txBox="1"/>
           <p:nvPr/>
         </p:nvSpPr>
@@ -13166,7 +13015,7 @@
       </p:sp>
       <p:sp>
         <p:nvSpPr>
-          <p:cNvPr id="25" name="S05-stepno64"/>
+          <p:cNvPr id="22" name="S05-stepno58"/>
           <p:cNvSpPr txBox="1"/>
           <p:nvPr/>
         </p:nvSpPr>
@@ -13211,7 +13060,7 @@
       </p:sp>
       <p:sp>
         <p:nvSpPr>
-          <p:cNvPr id="26" name="S05-text65"/>
+          <p:cNvPr id="23" name="S05-text59"/>
           <p:cNvSpPr txBox="1"/>
           <p:nvPr/>
         </p:nvSpPr>
@@ -13267,7 +13116,7 @@
       </p:sp>
       <p:sp>
         <p:nvSpPr>
-          <p:cNvPr id="27" name="S05-stepno66"/>
+          <p:cNvPr id="24" name="S05-stepno60"/>
           <p:cNvSpPr txBox="1"/>
           <p:nvPr/>
         </p:nvSpPr>
@@ -13312,7 +13161,7 @@
       </p:sp>
       <p:sp>
         <p:nvSpPr>
-          <p:cNvPr id="28" name="S05-text67"/>
+          <p:cNvPr id="25" name="S05-text61"/>
           <p:cNvSpPr txBox="1"/>
           <p:nvPr/>
         </p:nvSpPr>
@@ -13368,7 +13217,7 @@
       </p:sp>
       <p:sp>
         <p:nvSpPr>
-          <p:cNvPr id="29" name="S05-stepno68"/>
+          <p:cNvPr id="26" name="S05-stepno62"/>
           <p:cNvSpPr txBox="1"/>
           <p:nvPr/>
         </p:nvSpPr>
@@ -13413,7 +13262,7 @@
       </p:sp>
       <p:sp>
         <p:nvSpPr>
-          <p:cNvPr id="30" name="S05-text69"/>
+          <p:cNvPr id="27" name="S05-text63"/>
           <p:cNvSpPr txBox="1"/>
           <p:nvPr/>
         </p:nvSpPr>
@@ -13469,7 +13318,7 @@
       </p:sp>
       <p:sp>
         <p:nvSpPr>
-          <p:cNvPr id="31" name="S05-stepno70"/>
+          <p:cNvPr id="28" name="S05-stepno64"/>
           <p:cNvSpPr txBox="1"/>
           <p:nvPr/>
         </p:nvSpPr>
@@ -13514,7 +13363,7 @@
       </p:sp>
       <p:sp>
         <p:nvSpPr>
-          <p:cNvPr id="32" name="S05-text71"/>
+          <p:cNvPr id="29" name="S05-text65"/>
           <p:cNvSpPr txBox="1"/>
           <p:nvPr/>
         </p:nvSpPr>
@@ -13684,7 +13533,7 @@
       </p:sp>
       <p:sp>
         <p:nvSpPr>
-          <p:cNvPr id="3" name="S06-text72"/>
+          <p:cNvPr id="3" name="S06-text66"/>
           <p:cNvSpPr txBox="1"/>
           <p:nvPr/>
         </p:nvSpPr>
@@ -13723,7 +13572,7 @@
       </p:sp>
       <p:sp>
         <p:nvSpPr>
-          <p:cNvPr id="4" name="S06-card73"/>
+          <p:cNvPr id="4" name="S06-card67"/>
           <p:cNvSpPr/>
           <p:nvPr/>
         </p:nvSpPr>
@@ -13750,7 +13599,7 @@
       </p:sp>
       <p:sp>
         <p:nvSpPr>
-          <p:cNvPr id="5" name="S06-cardtext74"/>
+          <p:cNvPr id="5" name="S06-cardtext68"/>
           <p:cNvSpPr txBox="1"/>
           <p:nvPr/>
         </p:nvSpPr>
@@ -13792,7 +13641,7 @@
       </p:sp>
       <p:graphicFrame>
         <p:nvGraphicFramePr>
-          <p:cNvPr id="7" name="S06-table75"/>
+          <p:cNvPr id="7" name="S06-table69"/>
           <p:cNvGraphicFramePr>
             <a:graphicFrameLocks noGrp="1"/>
           </p:cNvGraphicFramePr>
@@ -14695,7 +14544,7 @@
       </p:sp>
       <p:sp>
         <p:nvSpPr>
-          <p:cNvPr id="3" name="S07-text76"/>
+          <p:cNvPr id="3" name="S07-text70"/>
           <p:cNvSpPr txBox="1"/>
           <p:nvPr/>
         </p:nvSpPr>
@@ -14734,7 +14583,7 @@
       </p:sp>
       <p:sp>
         <p:nvSpPr>
-          <p:cNvPr id="4" name="S07-card77"/>
+          <p:cNvPr id="4" name="S07-card71"/>
           <p:cNvSpPr/>
           <p:nvPr/>
         </p:nvSpPr>
@@ -14761,7 +14610,7 @@
       </p:sp>
       <p:sp>
         <p:nvSpPr>
-          <p:cNvPr id="5" name="S07-cardtext78"/>
+          <p:cNvPr id="5" name="S07-cardtext72"/>
           <p:cNvSpPr txBox="1"/>
           <p:nvPr/>
         </p:nvSpPr>
@@ -14803,7 +14652,7 @@
       </p:sp>
       <p:graphicFrame>
         <p:nvGraphicFramePr>
-          <p:cNvPr id="8" name="S07-table79"/>
+          <p:cNvPr id="8" name="S07-table73"/>
           <p:cNvGraphicFramePr>
             <a:graphicFrameLocks noGrp="1"/>
           </p:cNvGraphicFramePr>
@@ -15566,7 +15415,7 @@
       </p:sp>
       <p:sp>
         <p:nvSpPr>
-          <p:cNvPr id="3" name="S08-card80"/>
+          <p:cNvPr id="3" name="S08-card74"/>
           <p:cNvSpPr/>
           <p:nvPr/>
         </p:nvSpPr>
@@ -15593,7 +15442,7 @@
       </p:sp>
       <p:sp>
         <p:nvSpPr>
-          <p:cNvPr id="4" name="S08-cardtext81"/>
+          <p:cNvPr id="4" name="S08-cardtext75"/>
           <p:cNvSpPr txBox="1"/>
           <p:nvPr/>
         </p:nvSpPr>
@@ -15635,7 +15484,7 @@
       </p:sp>
       <p:sp>
         <p:nvSpPr>
-          <p:cNvPr id="5" name="S08-card82"/>
+          <p:cNvPr id="5" name="S08-card76"/>
           <p:cNvSpPr/>
           <p:nvPr/>
         </p:nvSpPr>
@@ -15662,7 +15511,7 @@
       </p:sp>
       <p:sp>
         <p:nvSpPr>
-          <p:cNvPr id="6" name="S08-cardtext83"/>
+          <p:cNvPr id="6" name="S08-cardtext77"/>
           <p:cNvSpPr txBox="1"/>
           <p:nvPr/>
         </p:nvSpPr>
@@ -15704,7 +15553,7 @@
       </p:sp>
       <p:sp>
         <p:nvSpPr>
-          <p:cNvPr id="7" name="S08-chip84"/>
+          <p:cNvPr id="7" name="S08-chip78"/>
           <p:cNvSpPr txBox="1"/>
           <p:nvPr/>
         </p:nvSpPr>
@@ -15751,7 +15600,7 @@
       </p:sp>
       <p:sp>
         <p:nvSpPr>
-          <p:cNvPr id="8" name="S08-text85"/>
+          <p:cNvPr id="8" name="S08-text79"/>
           <p:cNvSpPr txBox="1"/>
           <p:nvPr/>
         </p:nvSpPr>
@@ -15807,7 +15656,7 @@
       </p:sp>
       <p:sp>
         <p:nvSpPr>
-          <p:cNvPr id="9" name="S08-chip86"/>
+          <p:cNvPr id="9" name="S08-chip80"/>
           <p:cNvSpPr txBox="1"/>
           <p:nvPr/>
         </p:nvSpPr>
@@ -15854,7 +15703,7 @@
       </p:sp>
       <p:sp>
         <p:nvSpPr>
-          <p:cNvPr id="10" name="S08-text87"/>
+          <p:cNvPr id="10" name="S08-text81"/>
           <p:cNvSpPr txBox="1"/>
           <p:nvPr/>
         </p:nvSpPr>
@@ -16024,7 +15873,7 @@
       </p:sp>
       <p:sp>
         <p:nvSpPr>
-          <p:cNvPr id="3" name="S09-text88"/>
+          <p:cNvPr id="3" name="S09-text82"/>
           <p:cNvSpPr txBox="1"/>
           <p:nvPr/>
         </p:nvSpPr>
@@ -16063,7 +15912,7 @@
       </p:sp>
       <p:sp>
         <p:nvSpPr>
-          <p:cNvPr id="4" name="S09-card89"/>
+          <p:cNvPr id="4" name="S09-card83"/>
           <p:cNvSpPr/>
           <p:nvPr/>
         </p:nvSpPr>
@@ -16090,7 +15939,7 @@
       </p:sp>
       <p:sp>
         <p:nvSpPr>
-          <p:cNvPr id="5" name="S09-cardtext90"/>
+          <p:cNvPr id="5" name="S09-cardtext84"/>
           <p:cNvSpPr txBox="1"/>
           <p:nvPr/>
         </p:nvSpPr>
@@ -16132,7 +15981,7 @@
       </p:sp>
       <p:graphicFrame>
         <p:nvGraphicFramePr>
-          <p:cNvPr id="10" name="S09-table91"/>
+          <p:cNvPr id="10" name="S09-table85"/>
           <p:cNvGraphicFramePr>
             <a:graphicFrameLocks noGrp="1"/>
           </p:cNvGraphicFramePr>
